--- a/presentations/PR_L02_NumberWorkshop_Lesson.pptx
+++ b/presentations/PR_L02_NumberWorkshop_Lesson.pptx
@@ -2617,7 +2617,7 @@
                 <a:ea typeface="IBM Plex Sans" pitchFamily="34" charset="-122"/>
                 <a:cs typeface="IBM Plex Sans" pitchFamily="34" charset="-120"/>
               </a:rPr>
-              <a:t>Mistake: rounding part way through, which makes every figure after it slightly wrong.</a:t>
+              <a:t>Common mistake: rounding part way through, which makes every figure after it slightly wrong.</a:t>
             </a:r>
             <a:endParaRPr lang="en-US" sz="1700" dirty="0"/>
           </a:p>
@@ -7773,7 +7773,7 @@
                 <a:ea typeface="IBM Plex Sans" pitchFamily="34" charset="-122"/>
                 <a:cs typeface="IBM Plex Sans" pitchFamily="34" charset="-120"/>
               </a:rPr>
-              <a:t>Mistake: writing 2n for two lots of n, when Python needs 2 * n.</a:t>
+              <a:t>Common mistake: writing 2n for two lots of n, when Python needs 2 * n.</a:t>
             </a:r>
             <a:endParaRPr lang="en-US" sz="1700" dirty="0"/>
           </a:p>
@@ -8349,7 +8349,7 @@
                 <a:ea typeface="IBM Plex Sans" pitchFamily="34" charset="-122"/>
                 <a:cs typeface="IBM Plex Sans" pitchFamily="34" charset="-120"/>
               </a:rPr>
-              <a:t>Mistake: using / when the answer must be whole, which leaves a .0 on the end.</a:t>
+              <a:t>Common mistake: using / when the answer must be whole, which leaves a .0 on the end.</a:t>
             </a:r>
             <a:endParaRPr lang="en-US" sz="1700" dirty="0"/>
           </a:p>
@@ -8925,7 +8925,7 @@
                 <a:ea typeface="IBM Plex Sans" pitchFamily="34" charset="-122"/>
                 <a:cs typeface="IBM Plex Sans" pitchFamily="34" charset="-120"/>
               </a:rPr>
-              <a:t>Mistake: writing 5 ^ 2, which does something else entirely in Python.</a:t>
+              <a:t>Common mistake: writing 5 ^ 2, which does something else entirely in Python.</a:t>
             </a:r>
             <a:endParaRPr lang="en-US" sz="1700" dirty="0"/>
           </a:p>
@@ -9501,7 +9501,7 @@
                 <a:ea typeface="IBM Plex Sans" pitchFamily="34" charset="-122"/>
                 <a:cs typeface="IBM Plex Sans" pitchFamily="34" charset="-120"/>
               </a:rPr>
-              <a:t>Mistake: rounding early, then carrying the rounded value into the next calculation.</a:t>
+              <a:t>Common mistake: rounding early, then carrying the rounded value into the next calculation.</a:t>
             </a:r>
             <a:endParaRPr lang="en-US" sz="1700" dirty="0"/>
           </a:p>
@@ -10077,7 +10077,7 @@
                 <a:ea typeface="IBM Plex Sans" pitchFamily="34" charset="-122"/>
                 <a:cs typeface="IBM Plex Sans" pitchFamily="34" charset="-120"/>
               </a:rPr>
-              <a:t>Mistake: calling randint again instead of storing the number you have already drawn.</a:t>
+              <a:t>Common mistake: calling randint again instead of storing the number you have already drawn.</a:t>
             </a:r>
             <a:endParaRPr lang="en-US" sz="1700" dirty="0"/>
           </a:p>
